--- a/Presentazione_Comandi_Git.pptx
+++ b/Presentazione_Comandi_Git.pptx
@@ -1318,8 +1318,8 @@
       </dsp:nvSpPr>
       <dsp:spPr>
         <a:xfrm>
-          <a:off x="1123779" y="14638"/>
-          <a:ext cx="2024437" cy="2024437"/>
+          <a:off x="1525404" y="1130"/>
+          <a:ext cx="1749937" cy="1749937"/>
         </a:xfrm>
         <a:prstGeom prst="round2DiagRect">
           <a:avLst>
@@ -1360,8 +1360,8 @@
       </dsp:nvSpPr>
       <dsp:spPr>
         <a:xfrm>
-          <a:off x="1555217" y="446075"/>
-          <a:ext cx="1161562" cy="1161562"/>
+          <a:off x="1898342" y="374067"/>
+          <a:ext cx="1004062" cy="1004062"/>
         </a:xfrm>
         <a:prstGeom prst="rect">
           <a:avLst/>
@@ -1409,8 +1409,8 @@
       </dsp:nvSpPr>
       <dsp:spPr>
         <a:xfrm>
-          <a:off x="476623" y="2669638"/>
-          <a:ext cx="3318750" cy="720000"/>
+          <a:off x="965998" y="2296130"/>
+          <a:ext cx="2868750" cy="720000"/>
         </a:xfrm>
         <a:prstGeom prst="rect">
           <a:avLst/>
@@ -1439,7 +1439,7 @@
         </a:bodyPr>
         <a:lstStyle/>
         <a:p>
-          <a:pPr marL="0" lvl="0" indent="0" algn="ctr" defTabSz="755650">
+          <a:pPr marL="0" lvl="0" indent="0" algn="ctr" defTabSz="666750">
             <a:lnSpc>
               <a:spcPct val="90000"/>
             </a:lnSpc>
@@ -1453,15 +1453,15 @@
             <a:defRPr cap="all"/>
           </a:pPr>
           <a:r>
-            <a:rPr lang="en-US" sz="1700" b="0" i="0" kern="1200"/>
+            <a:rPr lang="en-US" sz="1500" b="0" i="0" kern="1200"/>
             <a:t>Git è un sistema di controllo di versione distribuito.</a:t>
           </a:r>
-          <a:endParaRPr lang="en-US" sz="1700" kern="1200"/>
+          <a:endParaRPr lang="en-US" sz="1500" kern="1200"/>
         </a:p>
       </dsp:txBody>
       <dsp:txXfrm>
-        <a:off x="476623" y="2669638"/>
-        <a:ext cx="3318750" cy="720000"/>
+        <a:off x="965998" y="2296130"/>
+        <a:ext cx="2868750" cy="720000"/>
       </dsp:txXfrm>
     </dsp:sp>
     <dsp:sp modelId="{BCDC459B-659D-4FB3-815B-31562282D885}">
@@ -1471,8 +1471,8 @@
       </dsp:nvSpPr>
       <dsp:spPr>
         <a:xfrm>
-          <a:off x="5023310" y="14638"/>
-          <a:ext cx="2024437" cy="2024437"/>
+          <a:off x="4896185" y="1130"/>
+          <a:ext cx="1749937" cy="1749937"/>
         </a:xfrm>
         <a:prstGeom prst="round2DiagRect">
           <a:avLst>
@@ -1513,8 +1513,8 @@
       </dsp:nvSpPr>
       <dsp:spPr>
         <a:xfrm>
-          <a:off x="5454748" y="446075"/>
-          <a:ext cx="1161562" cy="1161562"/>
+          <a:off x="5269123" y="374067"/>
+          <a:ext cx="1004062" cy="1004062"/>
         </a:xfrm>
         <a:prstGeom prst="rect">
           <a:avLst/>
@@ -1562,8 +1562,8 @@
       </dsp:nvSpPr>
       <dsp:spPr>
         <a:xfrm>
-          <a:off x="4376154" y="2669638"/>
-          <a:ext cx="3318750" cy="720000"/>
+          <a:off x="4336779" y="2296130"/>
+          <a:ext cx="2868750" cy="720000"/>
         </a:xfrm>
         <a:prstGeom prst="rect">
           <a:avLst/>
@@ -1592,7 +1592,7 @@
         </a:bodyPr>
         <a:lstStyle/>
         <a:p>
-          <a:pPr marL="0" lvl="0" indent="0" algn="ctr" defTabSz="755650">
+          <a:pPr marL="0" lvl="0" indent="0" algn="ctr" defTabSz="666750">
             <a:lnSpc>
               <a:spcPct val="90000"/>
             </a:lnSpc>
@@ -1606,15 +1606,15 @@
             <a:defRPr cap="all"/>
           </a:pPr>
           <a:r>
-            <a:rPr lang="en-US" sz="1700" b="0" i="0" kern="1200"/>
+            <a:rPr lang="en-US" sz="1500" b="0" i="0" kern="1200"/>
             <a:t>Permette di tracciare modifiche, collaborare e gestire versioni del codice.</a:t>
           </a:r>
-          <a:endParaRPr lang="en-US" sz="1700" kern="1200"/>
+          <a:endParaRPr lang="en-US" sz="1500" kern="1200"/>
         </a:p>
       </dsp:txBody>
       <dsp:txXfrm>
-        <a:off x="4376154" y="2669638"/>
-        <a:ext cx="3318750" cy="720000"/>
+        <a:off x="4336779" y="2296130"/>
+        <a:ext cx="2868750" cy="720000"/>
       </dsp:txXfrm>
     </dsp:sp>
   </dsp:spTree>
@@ -2964,7 +2964,7 @@
           <a:p>
             <a:fld id="{6060AB94-84F8-48C6-9F74-70EC94C99F37}" type="datetimeFigureOut">
               <a:rPr lang="en-GB" smtClean="0"/>
-              <a:t>27/06/2025</a:t>
+              <a:t>01/07/2025</a:t>
             </a:fld>
             <a:endParaRPr lang="en-GB"/>
           </a:p>
@@ -3418,7 +3418,7 @@
           <a:p>
             <a:fld id="{5BCAD085-E8A6-8845-BD4E-CB4CCA059FC4}" type="datetimeFigureOut">
               <a:rPr lang="en-US" smtClean="0"/>
-              <a:t>6/27/2025</a:t>
+              <a:t>7/1/2025</a:t>
             </a:fld>
             <a:endParaRPr lang="en-US"/>
           </a:p>
@@ -3693,7 +3693,7 @@
           <a:p>
             <a:fld id="{5BCAD085-E8A6-8845-BD4E-CB4CCA059FC4}" type="datetimeFigureOut">
               <a:rPr lang="en-US" smtClean="0"/>
-              <a:t>6/27/2025</a:t>
+              <a:t>7/1/2025</a:t>
             </a:fld>
             <a:endParaRPr lang="en-US"/>
           </a:p>
@@ -3887,7 +3887,7 @@
           <a:p>
             <a:fld id="{5BCAD085-E8A6-8845-BD4E-CB4CCA059FC4}" type="datetimeFigureOut">
               <a:rPr lang="en-US" smtClean="0"/>
-              <a:t>6/27/2025</a:t>
+              <a:t>7/1/2025</a:t>
             </a:fld>
             <a:endParaRPr lang="en-US"/>
           </a:p>
@@ -4160,7 +4160,7 @@
           <a:p>
             <a:fld id="{5BCAD085-E8A6-8845-BD4E-CB4CCA059FC4}" type="datetimeFigureOut">
               <a:rPr lang="en-US" smtClean="0"/>
-              <a:t>6/27/2025</a:t>
+              <a:t>7/1/2025</a:t>
             </a:fld>
             <a:endParaRPr lang="en-US"/>
           </a:p>
@@ -4501,7 +4501,7 @@
           <a:p>
             <a:fld id="{5BCAD085-E8A6-8845-BD4E-CB4CCA059FC4}" type="datetimeFigureOut">
               <a:rPr lang="en-US" smtClean="0"/>
-              <a:t>6/27/2025</a:t>
+              <a:t>7/1/2025</a:t>
             </a:fld>
             <a:endParaRPr lang="en-US"/>
           </a:p>
@@ -5124,7 +5124,7 @@
           <a:p>
             <a:fld id="{5BCAD085-E8A6-8845-BD4E-CB4CCA059FC4}" type="datetimeFigureOut">
               <a:rPr lang="en-US" smtClean="0"/>
-              <a:t>6/27/2025</a:t>
+              <a:t>7/1/2025</a:t>
             </a:fld>
             <a:endParaRPr lang="en-US"/>
           </a:p>
@@ -5984,7 +5984,7 @@
           <a:p>
             <a:fld id="{5BCAD085-E8A6-8845-BD4E-CB4CCA059FC4}" type="datetimeFigureOut">
               <a:rPr lang="en-US" smtClean="0"/>
-              <a:t>6/27/2025</a:t>
+              <a:t>7/1/2025</a:t>
             </a:fld>
             <a:endParaRPr lang="en-US"/>
           </a:p>
@@ -6154,7 +6154,7 @@
           <a:p>
             <a:fld id="{5BCAD085-E8A6-8845-BD4E-CB4CCA059FC4}" type="datetimeFigureOut">
               <a:rPr lang="en-US" smtClean="0"/>
-              <a:t>6/27/2025</a:t>
+              <a:t>7/1/2025</a:t>
             </a:fld>
             <a:endParaRPr lang="en-US"/>
           </a:p>
@@ -6334,7 +6334,7 @@
           <a:p>
             <a:fld id="{5BCAD085-E8A6-8845-BD4E-CB4CCA059FC4}" type="datetimeFigureOut">
               <a:rPr lang="en-US" smtClean="0"/>
-              <a:t>6/27/2025</a:t>
+              <a:t>7/1/2025</a:t>
             </a:fld>
             <a:endParaRPr lang="en-US"/>
           </a:p>
@@ -6544,7 +6544,7 @@
           <a:p>
             <a:fld id="{52BC9132-560A-43E9-9BB7-D14A4AA045C6}" type="datetimeFigureOut">
               <a:rPr lang="en-GB" smtClean="0"/>
-              <a:t>27/06/2025</a:t>
+              <a:t>01/07/2025</a:t>
             </a:fld>
             <a:endParaRPr lang="en-GB"/>
           </a:p>
@@ -6744,7 +6744,7 @@
           <a:p>
             <a:fld id="{52BC9132-560A-43E9-9BB7-D14A4AA045C6}" type="datetimeFigureOut">
               <a:rPr lang="en-GB" smtClean="0"/>
-              <a:t>27/06/2025</a:t>
+              <a:t>01/07/2025</a:t>
             </a:fld>
             <a:endParaRPr lang="en-GB"/>
           </a:p>
@@ -6926,7 +6926,7 @@
           <a:p>
             <a:fld id="{5BCAD085-E8A6-8845-BD4E-CB4CCA059FC4}" type="datetimeFigureOut">
               <a:rPr lang="en-US" smtClean="0"/>
-              <a:t>6/27/2025</a:t>
+              <a:t>7/1/2025</a:t>
             </a:fld>
             <a:endParaRPr lang="en-US"/>
           </a:p>
@@ -7190,7 +7190,7 @@
           <a:p>
             <a:fld id="{52BC9132-560A-43E9-9BB7-D14A4AA045C6}" type="datetimeFigureOut">
               <a:rPr lang="en-GB" smtClean="0"/>
-              <a:t>27/06/2025</a:t>
+              <a:t>01/07/2025</a:t>
             </a:fld>
             <a:endParaRPr lang="en-GB"/>
           </a:p>
@@ -7458,7 +7458,7 @@
           <a:p>
             <a:fld id="{52BC9132-560A-43E9-9BB7-D14A4AA045C6}" type="datetimeFigureOut">
               <a:rPr lang="en-GB" smtClean="0"/>
-              <a:t>27/06/2025</a:t>
+              <a:t>01/07/2025</a:t>
             </a:fld>
             <a:endParaRPr lang="en-GB"/>
           </a:p>
@@ -7873,7 +7873,7 @@
           <a:p>
             <a:fld id="{52BC9132-560A-43E9-9BB7-D14A4AA045C6}" type="datetimeFigureOut">
               <a:rPr lang="en-GB" smtClean="0"/>
-              <a:t>27/06/2025</a:t>
+              <a:t>01/07/2025</a:t>
             </a:fld>
             <a:endParaRPr lang="en-GB"/>
           </a:p>
@@ -8015,7 +8015,7 @@
           <a:p>
             <a:fld id="{52BC9132-560A-43E9-9BB7-D14A4AA045C6}" type="datetimeFigureOut">
               <a:rPr lang="en-GB" smtClean="0"/>
-              <a:t>27/06/2025</a:t>
+              <a:t>01/07/2025</a:t>
             </a:fld>
             <a:endParaRPr lang="en-GB"/>
           </a:p>
@@ -8128,7 +8128,7 @@
           <a:p>
             <a:fld id="{52BC9132-560A-43E9-9BB7-D14A4AA045C6}" type="datetimeFigureOut">
               <a:rPr lang="en-GB" smtClean="0"/>
-              <a:t>27/06/2025</a:t>
+              <a:t>01/07/2025</a:t>
             </a:fld>
             <a:endParaRPr lang="en-GB"/>
           </a:p>
@@ -8441,7 +8441,7 @@
           <a:p>
             <a:fld id="{52BC9132-560A-43E9-9BB7-D14A4AA045C6}" type="datetimeFigureOut">
               <a:rPr lang="en-GB" smtClean="0"/>
-              <a:t>27/06/2025</a:t>
+              <a:t>01/07/2025</a:t>
             </a:fld>
             <a:endParaRPr lang="en-GB"/>
           </a:p>
@@ -8730,7 +8730,7 @@
           <a:p>
             <a:fld id="{52BC9132-560A-43E9-9BB7-D14A4AA045C6}" type="datetimeFigureOut">
               <a:rPr lang="en-GB" smtClean="0"/>
-              <a:t>27/06/2025</a:t>
+              <a:t>01/07/2025</a:t>
             </a:fld>
             <a:endParaRPr lang="en-GB"/>
           </a:p>
@@ -8930,7 +8930,7 @@
           <a:p>
             <a:fld id="{52BC9132-560A-43E9-9BB7-D14A4AA045C6}" type="datetimeFigureOut">
               <a:rPr lang="en-GB" smtClean="0"/>
-              <a:t>27/06/2025</a:t>
+              <a:t>01/07/2025</a:t>
             </a:fld>
             <a:endParaRPr lang="en-GB"/>
           </a:p>
@@ -9140,7 +9140,7 @@
           <a:p>
             <a:fld id="{52BC9132-560A-43E9-9BB7-D14A4AA045C6}" type="datetimeFigureOut">
               <a:rPr lang="en-GB" smtClean="0"/>
-              <a:t>27/06/2025</a:t>
+              <a:t>01/07/2025</a:t>
             </a:fld>
             <a:endParaRPr lang="en-GB"/>
           </a:p>
@@ -9399,7 +9399,7 @@
           <a:p>
             <a:fld id="{5BCAD085-E8A6-8845-BD4E-CB4CCA059FC4}" type="datetimeFigureOut">
               <a:rPr lang="en-US" smtClean="0"/>
-              <a:t>6/27/2025</a:t>
+              <a:t>7/1/2025</a:t>
             </a:fld>
             <a:endParaRPr lang="en-US"/>
           </a:p>
@@ -9691,7 +9691,7 @@
           <a:p>
             <a:fld id="{5BCAD085-E8A6-8845-BD4E-CB4CCA059FC4}" type="datetimeFigureOut">
               <a:rPr lang="en-US" smtClean="0"/>
-              <a:t>6/27/2025</a:t>
+              <a:t>7/1/2025</a:t>
             </a:fld>
             <a:endParaRPr lang="en-US"/>
           </a:p>
@@ -10135,7 +10135,7 @@
           <a:p>
             <a:fld id="{5BCAD085-E8A6-8845-BD4E-CB4CCA059FC4}" type="datetimeFigureOut">
               <a:rPr lang="en-US" smtClean="0"/>
-              <a:t>6/27/2025</a:t>
+              <a:t>7/1/2025</a:t>
             </a:fld>
             <a:endParaRPr lang="en-US"/>
           </a:p>
@@ -10253,7 +10253,7 @@
           <a:p>
             <a:fld id="{5BCAD085-E8A6-8845-BD4E-CB4CCA059FC4}" type="datetimeFigureOut">
               <a:rPr lang="en-US" smtClean="0"/>
-              <a:t>6/27/2025</a:t>
+              <a:t>7/1/2025</a:t>
             </a:fld>
             <a:endParaRPr lang="en-US"/>
           </a:p>
@@ -10348,7 +10348,7 @@
           <a:p>
             <a:fld id="{5BCAD085-E8A6-8845-BD4E-CB4CCA059FC4}" type="datetimeFigureOut">
               <a:rPr lang="en-US" smtClean="0"/>
-              <a:t>6/27/2025</a:t>
+              <a:t>7/1/2025</a:t>
             </a:fld>
             <a:endParaRPr lang="en-US"/>
           </a:p>
@@ -10627,7 +10627,7 @@
           <a:p>
             <a:fld id="{5BCAD085-E8A6-8845-BD4E-CB4CCA059FC4}" type="datetimeFigureOut">
               <a:rPr lang="en-US" smtClean="0"/>
-              <a:t>6/27/2025</a:t>
+              <a:t>7/1/2025</a:t>
             </a:fld>
             <a:endParaRPr lang="en-US"/>
           </a:p>
@@ -10902,7 +10902,7 @@
           <a:p>
             <a:fld id="{5BCAD085-E8A6-8845-BD4E-CB4CCA059FC4}" type="datetimeFigureOut">
               <a:rPr lang="en-US" smtClean="0"/>
-              <a:t>6/27/2025</a:t>
+              <a:t>7/1/2025</a:t>
             </a:fld>
             <a:endParaRPr lang="en-US"/>
           </a:p>
@@ -11467,7 +11467,7 @@
           <a:p>
             <a:fld id="{5BCAD085-E8A6-8845-BD4E-CB4CCA059FC4}" type="datetimeFigureOut">
               <a:rPr lang="en-US" smtClean="0"/>
-              <a:t>6/27/2025</a:t>
+              <a:t>7/1/2025</a:t>
             </a:fld>
             <a:endParaRPr lang="en-US"/>
           </a:p>
@@ -12178,7 +12178,7 @@
           <a:p>
             <a:fld id="{52BC9132-560A-43E9-9BB7-D14A4AA045C6}" type="datetimeFigureOut">
               <a:rPr lang="en-GB" smtClean="0"/>
-              <a:t>27/06/2025</a:t>
+              <a:t>01/07/2025</a:t>
             </a:fld>
             <a:endParaRPr lang="en-GB"/>
           </a:p>
@@ -13649,14 +13649,14 @@
             <p:ph idx="1"/>
             <p:extLst>
               <p:ext uri="{D42A27DB-BD31-4B8C-83A1-F6EECF244321}">
-                <p14:modId xmlns:p14="http://schemas.microsoft.com/office/powerpoint/2010/main" val="1659142758"/>
+                <p14:modId xmlns:p14="http://schemas.microsoft.com/office/powerpoint/2010/main" val="4120964389"/>
               </p:ext>
             </p:extLst>
           </p:nvPr>
         </p:nvGraphicFramePr>
         <p:xfrm>
-          <a:off x="486697" y="2810256"/>
-          <a:ext cx="8171528" cy="3404277"/>
+          <a:off x="486697" y="2587999"/>
+          <a:ext cx="8171528" cy="3017260"/>
         </p:xfrm>
         <a:graphic>
           <a:graphicData uri="http://schemas.openxmlformats.org/drawingml/2006/diagram">
@@ -13718,6 +13718,36 @@
           <a:xfrm>
             <a:off x="-1" y="-14201"/>
             <a:ext cx="1571291" cy="1602717"/>
+          </a:xfrm>
+          <a:prstGeom prst="rect">
+            <a:avLst/>
+          </a:prstGeom>
+        </p:spPr>
+      </p:pic>
+      <p:pic>
+        <p:nvPicPr>
+          <p:cNvPr id="4" name="Immagine 3">
+            <a:extLst>
+              <a:ext uri="{FF2B5EF4-FFF2-40B4-BE49-F238E27FC236}">
+                <a16:creationId xmlns:a16="http://schemas.microsoft.com/office/drawing/2014/main" id="{BBE4589B-0FCB-D221-A806-F77B4B9E7BBF}"/>
+              </a:ext>
+            </a:extLst>
+          </p:cNvPr>
+          <p:cNvPicPr>
+            <a:picLocks noChangeAspect="1"/>
+          </p:cNvPicPr>
+          <p:nvPr/>
+        </p:nvPicPr>
+        <p:blipFill>
+          <a:blip r:embed="rId9"/>
+          <a:stretch>
+            <a:fillRect/>
+          </a:stretch>
+        </p:blipFill>
+        <p:spPr>
+          <a:xfrm>
+            <a:off x="1714243" y="-14201"/>
+            <a:ext cx="5715511" cy="685896"/>
           </a:xfrm>
           <a:prstGeom prst="rect">
             <a:avLst/>
@@ -14777,8 +14807,8 @@
         </p:nvSpPr>
         <p:spPr>
           <a:xfrm>
-            <a:off x="232638" y="275562"/>
-            <a:ext cx="6710641" cy="1400530"/>
+            <a:off x="232638" y="685896"/>
+            <a:ext cx="6710641" cy="990196"/>
           </a:xfrm>
         </p:spPr>
         <p:txBody>
@@ -14831,8 +14861,8 @@
         </p:nvSpPr>
         <p:spPr>
           <a:xfrm>
-            <a:off x="827484" y="2748983"/>
-            <a:ext cx="6709905" cy="3484879"/>
+            <a:off x="1153943" y="3462215"/>
+            <a:ext cx="6709905" cy="1521265"/>
           </a:xfrm>
         </p:spPr>
         <p:txBody>
@@ -14842,12 +14872,22 @@
           <a:lstStyle/>
           <a:p>
             <a:r>
+              <a:rPr dirty="0"/>
               <a:t>git config --global user.name "Tuo Nome"</a:t>
             </a:r>
           </a:p>
           <a:p>
             <a:r>
-              <a:t>git config --global user.email "tuo@email.com"</a:t>
+              <a:rPr dirty="0"/>
+              <a:t>git config --global </a:t>
+            </a:r>
+            <a:r>
+              <a:rPr dirty="0" err="1"/>
+              <a:t>user.email</a:t>
+            </a:r>
+            <a:r>
+              <a:rPr dirty="0"/>
+              <a:t> "tuo@email.com"</a:t>
             </a:r>
           </a:p>
         </p:txBody>
@@ -14906,6 +14946,36 @@
           <a:xfrm>
             <a:off x="7346605" y="-35637"/>
             <a:ext cx="1797394" cy="1833342"/>
+          </a:xfrm>
+          <a:prstGeom prst="rect">
+            <a:avLst/>
+          </a:prstGeom>
+        </p:spPr>
+      </p:pic>
+      <p:pic>
+        <p:nvPicPr>
+          <p:cNvPr id="5" name="Immagine 4">
+            <a:extLst>
+              <a:ext uri="{FF2B5EF4-FFF2-40B4-BE49-F238E27FC236}">
+                <a16:creationId xmlns:a16="http://schemas.microsoft.com/office/drawing/2014/main" id="{99A4E152-48BA-0398-8B3B-002E524065BD}"/>
+              </a:ext>
+            </a:extLst>
+          </p:cNvPr>
+          <p:cNvPicPr>
+            <a:picLocks noChangeAspect="1"/>
+          </p:cNvPicPr>
+          <p:nvPr/>
+        </p:nvPicPr>
+        <p:blipFill>
+          <a:blip r:embed="rId4"/>
+          <a:stretch>
+            <a:fillRect/>
+          </a:stretch>
+        </p:blipFill>
+        <p:spPr>
+          <a:xfrm>
+            <a:off x="15192" y="0"/>
+            <a:ext cx="7316221" cy="685896"/>
           </a:xfrm>
           <a:prstGeom prst="rect">
             <a:avLst/>
@@ -16006,8 +16076,8 @@
         </p:nvSpPr>
         <p:spPr>
           <a:xfrm>
-            <a:off x="827484" y="2763520"/>
-            <a:ext cx="6709905" cy="3484879"/>
+            <a:off x="900636" y="3556813"/>
+            <a:ext cx="6709905" cy="1958715"/>
           </a:xfrm>
         </p:spPr>
         <p:txBody>
@@ -16112,6 +16182,36 @@
           <a:xfrm>
             <a:off x="6763063" y="-107045"/>
             <a:ext cx="2381250" cy="2428875"/>
+          </a:xfrm>
+          <a:prstGeom prst="rect">
+            <a:avLst/>
+          </a:prstGeom>
+        </p:spPr>
+      </p:pic>
+      <p:pic>
+        <p:nvPicPr>
+          <p:cNvPr id="5" name="Immagine 4">
+            <a:extLst>
+              <a:ext uri="{FF2B5EF4-FFF2-40B4-BE49-F238E27FC236}">
+                <a16:creationId xmlns:a16="http://schemas.microsoft.com/office/drawing/2014/main" id="{058F756D-353B-6F31-F22A-5BABC00E070A}"/>
+              </a:ext>
+            </a:extLst>
+          </p:cNvPr>
+          <p:cNvPicPr>
+            <a:picLocks noChangeAspect="1"/>
+          </p:cNvPicPr>
+          <p:nvPr/>
+        </p:nvPicPr>
+        <p:blipFill>
+          <a:blip r:embed="rId4"/>
+          <a:stretch>
+            <a:fillRect/>
+          </a:stretch>
+        </p:blipFill>
+        <p:spPr>
+          <a:xfrm>
+            <a:off x="-313" y="-3911"/>
+            <a:ext cx="7316221" cy="685896"/>
           </a:xfrm>
           <a:prstGeom prst="rect">
             <a:avLst/>
@@ -17204,8 +17304,8 @@
         </p:nvSpPr>
         <p:spPr>
           <a:xfrm>
-            <a:off x="827484" y="2763520"/>
-            <a:ext cx="6709905" cy="3484879"/>
+            <a:off x="782835" y="3359605"/>
+            <a:ext cx="7578328" cy="1900855"/>
           </a:xfrm>
         </p:spPr>
         <p:txBody>
@@ -17215,17 +17315,76 @@
           <a:lstStyle/>
           <a:p>
             <a:r>
-              <a:t>git status       → Mostra lo stato dei file</a:t>
-            </a:r>
-          </a:p>
-          <a:p>
-            <a:r>
-              <a:t>git add FILE     → Aggiunge un file all'area di staging</a:t>
-            </a:r>
-          </a:p>
-          <a:p>
-            <a:r>
-              <a:t>git add .        → Aggiunge tutti i file</a:t>
+              <a:rPr dirty="0"/>
+              <a:t>git status       → </a:t>
+            </a:r>
+            <a:r>
+              <a:rPr dirty="0" err="1"/>
+              <a:t>Mostra</a:t>
+            </a:r>
+            <a:r>
+              <a:rPr dirty="0"/>
+              <a:t> lo </a:t>
+            </a:r>
+            <a:r>
+              <a:rPr dirty="0" err="1"/>
+              <a:t>stato</a:t>
+            </a:r>
+            <a:r>
+              <a:rPr dirty="0"/>
+              <a:t> </a:t>
+            </a:r>
+            <a:r>
+              <a:rPr dirty="0" err="1"/>
+              <a:t>dei</a:t>
+            </a:r>
+            <a:r>
+              <a:rPr dirty="0"/>
+              <a:t> file</a:t>
+            </a:r>
+          </a:p>
+          <a:p>
+            <a:r>
+              <a:rPr dirty="0"/>
+              <a:t>git add FILE     → </a:t>
+            </a:r>
+            <a:r>
+              <a:rPr dirty="0" err="1"/>
+              <a:t>Aggiunge</a:t>
+            </a:r>
+            <a:r>
+              <a:rPr dirty="0"/>
+              <a:t> un file </a:t>
+            </a:r>
+            <a:r>
+              <a:rPr dirty="0" err="1"/>
+              <a:t>all'area</a:t>
+            </a:r>
+            <a:r>
+              <a:rPr dirty="0"/>
+              <a:t> di staging</a:t>
+            </a:r>
+          </a:p>
+          <a:p>
+            <a:r>
+              <a:rPr dirty="0"/>
+              <a:t>git add .        → </a:t>
+            </a:r>
+            <a:r>
+              <a:rPr dirty="0" err="1"/>
+              <a:t>Aggiunge</a:t>
+            </a:r>
+            <a:r>
+              <a:rPr dirty="0"/>
+              <a:t> tutti </a:t>
+            </a:r>
+            <a:r>
+              <a:rPr dirty="0" err="1"/>
+              <a:t>i</a:t>
+            </a:r>
+            <a:r>
+              <a:rPr dirty="0"/>
+              <a:t> file</a:t>
             </a:r>
           </a:p>
         </p:txBody>
@@ -17284,6 +17443,36 @@
           <a:xfrm>
             <a:off x="6894909" y="-142713"/>
             <a:ext cx="2381250" cy="2428875"/>
+          </a:xfrm>
+          <a:prstGeom prst="rect">
+            <a:avLst/>
+          </a:prstGeom>
+        </p:spPr>
+      </p:pic>
+      <p:pic>
+        <p:nvPicPr>
+          <p:cNvPr id="8" name="Immagine 7">
+            <a:extLst>
+              <a:ext uri="{FF2B5EF4-FFF2-40B4-BE49-F238E27FC236}">
+                <a16:creationId xmlns:a16="http://schemas.microsoft.com/office/drawing/2014/main" id="{323111CA-39B7-E715-0DEA-E33A5CBC3E94}"/>
+              </a:ext>
+            </a:extLst>
+          </p:cNvPr>
+          <p:cNvPicPr>
+            <a:picLocks noChangeAspect="1"/>
+          </p:cNvPicPr>
+          <p:nvPr/>
+        </p:nvPicPr>
+        <p:blipFill>
+          <a:blip r:embed="rId4"/>
+          <a:stretch>
+            <a:fillRect/>
+          </a:stretch>
+        </p:blipFill>
+        <p:spPr>
+          <a:xfrm>
+            <a:off x="-313" y="-14007"/>
+            <a:ext cx="7316221" cy="685896"/>
           </a:xfrm>
           <a:prstGeom prst="rect">
             <a:avLst/>
@@ -18389,8 +18578,8 @@
         </p:nvSpPr>
         <p:spPr>
           <a:xfrm>
-            <a:off x="827484" y="2763520"/>
-            <a:ext cx="6709905" cy="3484879"/>
+            <a:off x="683418" y="3629372"/>
+            <a:ext cx="7402116" cy="1168400"/>
           </a:xfrm>
         </p:spPr>
         <p:txBody>
@@ -18400,12 +18589,46 @@
           <a:lstStyle/>
           <a:p>
             <a:r>
-              <a:t>git commit -m "Messaggio"   → Crea un commit</a:t>
-            </a:r>
-          </a:p>
-          <a:p>
-            <a:r>
-              <a:t>git log                      → Mostra la cronologia dei commit</a:t>
+              <a:rPr dirty="0"/>
+              <a:t>git commit -m "</a:t>
+            </a:r>
+            <a:r>
+              <a:rPr dirty="0" err="1"/>
+              <a:t>Messaggio</a:t>
+            </a:r>
+            <a:r>
+              <a:rPr dirty="0"/>
+              <a:t>"   → Crea un commit</a:t>
+            </a:r>
+          </a:p>
+          <a:p>
+            <a:r>
+              <a:rPr dirty="0"/>
+              <a:t>git log                      → </a:t>
+            </a:r>
+            <a:r>
+              <a:rPr dirty="0" err="1"/>
+              <a:t>Mostra</a:t>
+            </a:r>
+            <a:r>
+              <a:rPr dirty="0"/>
+              <a:t> la </a:t>
+            </a:r>
+            <a:r>
+              <a:rPr dirty="0" err="1"/>
+              <a:t>cronologia</a:t>
+            </a:r>
+            <a:r>
+              <a:rPr dirty="0"/>
+              <a:t> </a:t>
+            </a:r>
+            <a:r>
+              <a:rPr dirty="0" err="1"/>
+              <a:t>dei</a:t>
+            </a:r>
+            <a:r>
+              <a:rPr dirty="0"/>
+              <a:t> commit</a:t>
             </a:r>
           </a:p>
         </p:txBody>
@@ -18464,6 +18687,36 @@
           <a:xfrm>
             <a:off x="6763063" y="-107045"/>
             <a:ext cx="2381250" cy="2428875"/>
+          </a:xfrm>
+          <a:prstGeom prst="rect">
+            <a:avLst/>
+          </a:prstGeom>
+        </p:spPr>
+      </p:pic>
+      <p:pic>
+        <p:nvPicPr>
+          <p:cNvPr id="8" name="Immagine 7">
+            <a:extLst>
+              <a:ext uri="{FF2B5EF4-FFF2-40B4-BE49-F238E27FC236}">
+                <a16:creationId xmlns:a16="http://schemas.microsoft.com/office/drawing/2014/main" id="{A198A6A5-86C7-1489-2E86-381FB8BEE0A4}"/>
+              </a:ext>
+            </a:extLst>
+          </p:cNvPr>
+          <p:cNvPicPr>
+            <a:picLocks noChangeAspect="1"/>
+          </p:cNvPicPr>
+          <p:nvPr/>
+        </p:nvPicPr>
+        <p:blipFill>
+          <a:blip r:embed="rId4"/>
+          <a:stretch>
+            <a:fillRect/>
+          </a:stretch>
+        </p:blipFill>
+        <p:spPr>
+          <a:xfrm>
+            <a:off x="-313" y="11028"/>
+            <a:ext cx="7316221" cy="685896"/>
           </a:xfrm>
           <a:prstGeom prst="rect">
             <a:avLst/>
@@ -19580,13 +19833,13 @@
         </p:nvSpPr>
         <p:spPr>
           <a:xfrm>
-            <a:off x="827484" y="2763520"/>
-            <a:ext cx="6709905" cy="3484879"/>
+            <a:off x="64008" y="2453032"/>
+            <a:ext cx="8650224" cy="2720334"/>
           </a:xfrm>
         </p:spPr>
         <p:txBody>
           <a:bodyPr>
-            <a:normAutofit/>
+            <a:normAutofit fontScale="92500" lnSpcReduction="10000"/>
           </a:bodyPr>
           <a:lstStyle/>
           <a:p>
@@ -19610,6 +19863,10 @@
               <a:rPr dirty="0"/>
               <a:t> branch</a:t>
             </a:r>
+            <a:endParaRPr lang="en-GB" dirty="0"/>
+          </a:p>
+          <a:p>
+            <a:endParaRPr dirty="0"/>
           </a:p>
           <a:p>
             <a:r>
@@ -19635,6 +19892,9 @@
             <a:endParaRPr lang="en-GB" dirty="0"/>
           </a:p>
           <a:p>
+            <a:endParaRPr lang="en-GB" dirty="0"/>
+          </a:p>
+          <a:p>
             <a:r>
               <a:rPr lang="it-IT" dirty="0" err="1"/>
               <a:t>git</a:t>
@@ -19659,6 +19919,9 @@
               <a:rPr lang="it-IT" dirty="0"/>
               <a:t> esistente</a:t>
             </a:r>
+          </a:p>
+          <a:p>
+            <a:endParaRPr lang="it-IT" dirty="0"/>
           </a:p>
           <a:p>
             <a:r>
@@ -19742,6 +20005,36 @@
           <a:xfrm>
             <a:off x="6763063" y="-142713"/>
             <a:ext cx="2381250" cy="2428875"/>
+          </a:xfrm>
+          <a:prstGeom prst="rect">
+            <a:avLst/>
+          </a:prstGeom>
+        </p:spPr>
+      </p:pic>
+      <p:pic>
+        <p:nvPicPr>
+          <p:cNvPr id="8" name="Immagine 7">
+            <a:extLst>
+              <a:ext uri="{FF2B5EF4-FFF2-40B4-BE49-F238E27FC236}">
+                <a16:creationId xmlns:a16="http://schemas.microsoft.com/office/drawing/2014/main" id="{D7AB6D3F-359D-C8D8-0700-F40EF765AA36}"/>
+              </a:ext>
+            </a:extLst>
+          </p:cNvPr>
+          <p:cNvPicPr>
+            <a:picLocks noChangeAspect="1"/>
+          </p:cNvPicPr>
+          <p:nvPr/>
+        </p:nvPicPr>
+        <p:blipFill>
+          <a:blip r:embed="rId4"/>
+          <a:stretch>
+            <a:fillRect/>
+          </a:stretch>
+        </p:blipFill>
+        <p:spPr>
+          <a:xfrm>
+            <a:off x="-313" y="-24640"/>
+            <a:ext cx="7316221" cy="685896"/>
           </a:xfrm>
           <a:prstGeom prst="rect">
             <a:avLst/>
@@ -20801,13 +21094,13 @@
         </p:nvSpPr>
         <p:spPr>
           <a:xfrm>
-            <a:off x="827484" y="452718"/>
-            <a:ext cx="6710641" cy="1400530"/>
+            <a:off x="827484" y="710248"/>
+            <a:ext cx="6710641" cy="1143000"/>
           </a:xfrm>
         </p:spPr>
         <p:txBody>
           <a:bodyPr anchor="ctr">
-            <a:normAutofit/>
+            <a:normAutofit fontScale="90000"/>
           </a:bodyPr>
           <a:lstStyle/>
           <a:p>
@@ -20863,8 +21156,8 @@
         </p:nvSpPr>
         <p:spPr>
           <a:xfrm>
-            <a:off x="827484" y="2763520"/>
-            <a:ext cx="6709905" cy="3484879"/>
+            <a:off x="737804" y="3677861"/>
+            <a:ext cx="7667625" cy="1143000"/>
           </a:xfrm>
         </p:spPr>
         <p:txBody>
@@ -20874,13 +21167,57 @@
           <a:lstStyle/>
           <a:p>
             <a:r>
-              <a:t>git pull        → Scarica e integra le modifiche dal remoto</a:t>
-            </a:r>
-          </a:p>
-          <a:p>
-            <a:r>
-              <a:t>git push        → Invia le modifiche al repository remoto</a:t>
-            </a:r>
+              <a:rPr dirty="0"/>
+              <a:t>git pull        → </a:t>
+            </a:r>
+            <a:r>
+              <a:rPr dirty="0" err="1"/>
+              <a:t>Scarica</a:t>
+            </a:r>
+            <a:r>
+              <a:rPr dirty="0"/>
+              <a:t> e integra le </a:t>
+            </a:r>
+            <a:r>
+              <a:rPr dirty="0" err="1"/>
+              <a:t>modifiche</a:t>
+            </a:r>
+            <a:r>
+              <a:rPr dirty="0"/>
+              <a:t> dal </a:t>
+            </a:r>
+            <a:r>
+              <a:rPr dirty="0" err="1"/>
+              <a:t>remoto</a:t>
+            </a:r>
+            <a:endParaRPr dirty="0"/>
+          </a:p>
+          <a:p>
+            <a:r>
+              <a:rPr dirty="0"/>
+              <a:t>git push        → </a:t>
+            </a:r>
+            <a:r>
+              <a:rPr dirty="0" err="1"/>
+              <a:t>Invia</a:t>
+            </a:r>
+            <a:r>
+              <a:rPr dirty="0"/>
+              <a:t> le </a:t>
+            </a:r>
+            <a:r>
+              <a:rPr dirty="0" err="1"/>
+              <a:t>modifiche</a:t>
+            </a:r>
+            <a:r>
+              <a:rPr dirty="0"/>
+              <a:t> al repository </a:t>
+            </a:r>
+            <a:r>
+              <a:rPr dirty="0" err="1"/>
+              <a:t>remoto</a:t>
+            </a:r>
+            <a:endParaRPr dirty="0"/>
           </a:p>
         </p:txBody>
       </p:sp>
@@ -20944,6 +21281,36 @@
           </a:prstGeom>
         </p:spPr>
       </p:pic>
+      <p:pic>
+        <p:nvPicPr>
+          <p:cNvPr id="6" name="Immagine 5">
+            <a:extLst>
+              <a:ext uri="{FF2B5EF4-FFF2-40B4-BE49-F238E27FC236}">
+                <a16:creationId xmlns:a16="http://schemas.microsoft.com/office/drawing/2014/main" id="{1862E33B-8568-0A7C-5E69-F3AFBF2FE167}"/>
+              </a:ext>
+            </a:extLst>
+          </p:cNvPr>
+          <p:cNvPicPr>
+            <a:picLocks noChangeAspect="1"/>
+          </p:cNvPicPr>
+          <p:nvPr/>
+        </p:nvPicPr>
+        <p:blipFill>
+          <a:blip r:embed="rId4"/>
+          <a:stretch>
+            <a:fillRect/>
+          </a:stretch>
+        </p:blipFill>
+        <p:spPr>
+          <a:xfrm>
+            <a:off x="-20510" y="-41058"/>
+            <a:ext cx="7316221" cy="685896"/>
+          </a:xfrm>
+          <a:prstGeom prst="rect">
+            <a:avLst/>
+          </a:prstGeom>
+        </p:spPr>
+      </p:pic>
     </p:spTree>
   </p:cSld>
   <p:clrMapOvr>
@@ -20979,14 +21346,21 @@
             <p:ph type="title"/>
           </p:nvPr>
         </p:nvSpPr>
-        <p:spPr/>
+        <p:spPr>
+          <a:xfrm>
+            <a:off x="484710" y="850392"/>
+            <a:ext cx="7055380" cy="1002856"/>
+          </a:xfrm>
+        </p:spPr>
         <p:txBody>
           <a:bodyPr/>
           <a:lstStyle/>
           <a:p>
             <a:r>
+              <a:rPr dirty="0" err="1"/>
               <a:t>Conclusione</a:t>
             </a:r>
+            <a:endParaRPr dirty="0"/>
           </a:p>
         </p:txBody>
       </p:sp>
@@ -21000,18 +21374,93 @@
             <p:ph idx="1"/>
           </p:nvPr>
         </p:nvSpPr>
-        <p:spPr/>
+        <p:spPr>
+          <a:xfrm>
+            <a:off x="828436" y="3058765"/>
+            <a:ext cx="6711654" cy="4195481"/>
+          </a:xfrm>
+        </p:spPr>
         <p:txBody>
           <a:bodyPr/>
           <a:lstStyle/>
           <a:p>
             <a:r>
-              <a:t>Git è uno strumento potente per lo sviluppo collaborativo.</a:t>
-            </a:r>
-          </a:p>
-          <a:p>
-            <a:r>
-              <a:t>Usare spesso commit e push aiuta a non perdere il lavoro.</a:t>
+              <a:rPr dirty="0"/>
+              <a:t>Git è uno </a:t>
+            </a:r>
+            <a:r>
+              <a:rPr dirty="0" err="1"/>
+              <a:t>strumento</a:t>
+            </a:r>
+            <a:r>
+              <a:rPr dirty="0"/>
+              <a:t> </a:t>
+            </a:r>
+            <a:r>
+              <a:rPr dirty="0" err="1"/>
+              <a:t>potente</a:t>
+            </a:r>
+            <a:r>
+              <a:rPr dirty="0"/>
+              <a:t> per lo </a:t>
+            </a:r>
+            <a:r>
+              <a:rPr dirty="0" err="1"/>
+              <a:t>sviluppo</a:t>
+            </a:r>
+            <a:r>
+              <a:rPr dirty="0"/>
+              <a:t> </a:t>
+            </a:r>
+            <a:r>
+              <a:rPr dirty="0" err="1"/>
+              <a:t>collaborativo</a:t>
+            </a:r>
+            <a:r>
+              <a:rPr dirty="0"/>
+              <a:t>.</a:t>
+            </a:r>
+          </a:p>
+          <a:p>
+            <a:r>
+              <a:rPr dirty="0" err="1"/>
+              <a:t>Usare</a:t>
+            </a:r>
+            <a:r>
+              <a:rPr dirty="0"/>
+              <a:t> </a:t>
+            </a:r>
+            <a:r>
+              <a:rPr dirty="0" err="1"/>
+              <a:t>spesso</a:t>
+            </a:r>
+            <a:r>
+              <a:rPr dirty="0"/>
+              <a:t> commit e push </a:t>
+            </a:r>
+            <a:r>
+              <a:rPr dirty="0" err="1"/>
+              <a:t>aiuta</a:t>
+            </a:r>
+            <a:r>
+              <a:rPr dirty="0"/>
+              <a:t> a non </a:t>
+            </a:r>
+            <a:r>
+              <a:rPr dirty="0" err="1"/>
+              <a:t>perdere</a:t>
+            </a:r>
+            <a:r>
+              <a:rPr dirty="0"/>
+              <a:t> il </a:t>
+            </a:r>
+            <a:r>
+              <a:rPr dirty="0" err="1"/>
+              <a:t>lavoro</a:t>
+            </a:r>
+            <a:r>
+              <a:rPr dirty="0"/>
+              <a:t>.</a:t>
             </a:r>
           </a:p>
         </p:txBody>
@@ -21040,6 +21489,36 @@
           <a:xfrm>
             <a:off x="6616188" y="-61455"/>
             <a:ext cx="2381250" cy="2428875"/>
+          </a:xfrm>
+          <a:prstGeom prst="rect">
+            <a:avLst/>
+          </a:prstGeom>
+        </p:spPr>
+      </p:pic>
+      <p:pic>
+        <p:nvPicPr>
+          <p:cNvPr id="5" name="Immagine 4">
+            <a:extLst>
+              <a:ext uri="{FF2B5EF4-FFF2-40B4-BE49-F238E27FC236}">
+                <a16:creationId xmlns:a16="http://schemas.microsoft.com/office/drawing/2014/main" id="{8FE92604-F42F-38DC-552D-8976602FAD1F}"/>
+              </a:ext>
+            </a:extLst>
+          </p:cNvPr>
+          <p:cNvPicPr>
+            <a:picLocks noChangeAspect="1"/>
+          </p:cNvPicPr>
+          <p:nvPr/>
+        </p:nvPicPr>
+        <p:blipFill>
+          <a:blip r:embed="rId3"/>
+          <a:stretch>
+            <a:fillRect/>
+          </a:stretch>
+        </p:blipFill>
+        <p:spPr>
+          <a:xfrm>
+            <a:off x="0" y="0"/>
+            <a:ext cx="7316221" cy="685896"/>
           </a:xfrm>
           <a:prstGeom prst="rect">
             <a:avLst/>
